--- a/totem/2026-10-24_totem-experience_les-trois-kits.pptx
+++ b/totem/2026-10-24_totem-experience_les-trois-kits.pptx
@@ -3247,7 +3247,7 @@
       </p:sp>
       <p:pic>
         <p:nvPicPr>
-          <p:cNvPr id="6" name="Picture 5" descr="kit-equipe_boite_74.jpg"/>
+          <p:cNvPr id="6" name="Picture 5" descr="kit-equipe_boite_74_5.jpg"/>
           <p:cNvPicPr>
             <a:picLocks noChangeAspect="1"/>
           </p:cNvPicPr>
@@ -3924,7 +3924,7 @@
       </p:sp>
       <p:pic>
         <p:nvPicPr>
-          <p:cNvPr id="8" name="Picture 7" descr="kit-equipe_carte_149.jpg"/>
+          <p:cNvPr id="8" name="Picture 7" descr="kit-equipe_carte_149_50.jpg"/>
           <p:cNvPicPr>
             <a:picLocks noChangeAspect="1"/>
           </p:cNvPicPr>
@@ -4029,9 +4029,48 @@
           </a:p>
         </p:txBody>
       </p:sp>
+      <p:sp>
+        <p:nvSpPr>
+          <p:cNvPr id="11" name="TextBox 10"/>
+          <p:cNvSpPr txBox="1"/>
+          <p:nvPr/>
+        </p:nvSpPr>
+        <p:spPr>
+          <a:xfrm>
+            <a:off x="548640" y="4617720"/>
+            <a:ext cx="3474720" cy="640080"/>
+          </a:xfrm>
+          <a:prstGeom prst="rect">
+            <a:avLst/>
+          </a:prstGeom>
+          <a:noFill/>
+        </p:spPr>
+        <p:txBody>
+          <a:bodyPr wrap="square" lIns="0" rIns="0" tIns="0" bIns="0">
+            <a:spAutoFit/>
+          </a:bodyPr>
+          <a:lstStyle/>
+          <a:p>
+            <a:pPr>
+              <a:spcAft>
+                <a:spcPts val="359"/>
+              </a:spcAft>
+            </a:pPr>
+            <a:r>
+              <a:rPr sz="1200" b="0">
+                <a:solidFill>
+                  <a:srgbClr val="555555"/>
+                </a:solidFill>
+                <a:latin typeface="Montserrat"/>
+              </a:rPr>
+              <a:t>« Bienvenue dans la tribu. »</a:t>
+            </a:r>
+          </a:p>
+        </p:txBody>
+      </p:sp>
       <p:pic>
         <p:nvPicPr>
-          <p:cNvPr id="11" name="Picture 10" descr="kit-client_carte_149.jpg"/>
+          <p:cNvPr id="12" name="Picture 11" descr="kit-client_carte_149_50.jpg"/>
           <p:cNvPicPr>
             <a:picLocks noChangeAspect="1"/>
           </p:cNvPicPr>
@@ -4055,7 +4094,7 @@
       </p:pic>
       <p:sp>
         <p:nvSpPr>
-          <p:cNvPr id="12" name="Rectangle 11"/>
+          <p:cNvPr id="13" name="Rectangle 12"/>
           <p:cNvSpPr/>
           <p:nvPr/>
         </p:nvSpPr>
@@ -4099,7 +4138,7 @@
       </p:sp>
       <p:sp>
         <p:nvSpPr>
-          <p:cNvPr id="13" name="TextBox 12"/>
+          <p:cNvPr id="14" name="TextBox 13"/>
           <p:cNvSpPr txBox="1"/>
           <p:nvPr/>
         </p:nvSpPr>
@@ -4136,9 +4175,48 @@
           </a:p>
         </p:txBody>
       </p:sp>
+      <p:sp>
+        <p:nvSpPr>
+          <p:cNvPr id="15" name="TextBox 14"/>
+          <p:cNvSpPr txBox="1"/>
+          <p:nvPr/>
+        </p:nvSpPr>
+        <p:spPr>
+          <a:xfrm>
+            <a:off x="4297679" y="4617720"/>
+            <a:ext cx="3474720" cy="640080"/>
+          </a:xfrm>
+          <a:prstGeom prst="rect">
+            <a:avLst/>
+          </a:prstGeom>
+          <a:noFill/>
+        </p:spPr>
+        <p:txBody>
+          <a:bodyPr wrap="square" lIns="0" rIns="0" tIns="0" bIns="0">
+            <a:spAutoFit/>
+          </a:bodyPr>
+          <a:lstStyle/>
+          <a:p>
+            <a:pPr>
+              <a:spcAft>
+                <a:spcPts val="359"/>
+              </a:spcAft>
+            </a:pPr>
+            <a:r>
+              <a:rPr sz="1200" b="0">
+                <a:solidFill>
+                  <a:srgbClr val="555555"/>
+                </a:solidFill>
+                <a:latin typeface="Montserrat"/>
+              </a:rPr>
+              <a:t>« Merci d’avoir créé avec nous. »</a:t>
+            </a:r>
+          </a:p>
+        </p:txBody>
+      </p:sp>
       <p:pic>
         <p:nvPicPr>
-          <p:cNvPr id="14" name="Picture 13" descr="kit-adicomdays_carte_149.jpg"/>
+          <p:cNvPr id="16" name="Picture 15" descr="kit-adicomdays_carte_149_50.jpg"/>
           <p:cNvPicPr>
             <a:picLocks noChangeAspect="1"/>
           </p:cNvPicPr>
@@ -4162,7 +4240,7 @@
       </p:pic>
       <p:sp>
         <p:nvSpPr>
-          <p:cNvPr id="15" name="Rectangle 14"/>
+          <p:cNvPr id="17" name="Rectangle 16"/>
           <p:cNvSpPr/>
           <p:nvPr/>
         </p:nvSpPr>
@@ -4206,7 +4284,7 @@
       </p:sp>
       <p:sp>
         <p:nvSpPr>
-          <p:cNvPr id="16" name="TextBox 15"/>
+          <p:cNvPr id="18" name="TextBox 17"/>
           <p:cNvSpPr txBox="1"/>
           <p:nvPr/>
         </p:nvSpPr>
@@ -4245,14 +4323,14 @@
       </p:sp>
       <p:sp>
         <p:nvSpPr>
-          <p:cNvPr id="17" name="TextBox 16"/>
-          <p:cNvSpPr txBox="1"/>
-          <p:nvPr/>
-        </p:nvSpPr>
-        <p:spPr>
-          <a:xfrm>
-            <a:off x="548640" y="4846320"/>
-            <a:ext cx="11064240" cy="365760"/>
+          <p:cNvPr id="19" name="TextBox 18"/>
+          <p:cNvSpPr txBox="1"/>
+          <p:nvPr/>
+        </p:nvSpPr>
+        <p:spPr>
+          <a:xfrm>
+            <a:off x="8046719" y="4617720"/>
+            <a:ext cx="3474720" cy="640080"/>
           </a:xfrm>
           <a:prstGeom prst="rect">
             <a:avLst/>
@@ -4271,64 +4349,48 @@
               </a:spcAft>
             </a:pPr>
             <a:r>
-              <a:rPr sz="1200" b="1">
+              <a:rPr sz="1200" b="0">
+                <a:solidFill>
+                  <a:srgbClr val="555555"/>
+                </a:solidFill>
+                <a:latin typeface="Montserrat"/>
+              </a:rPr>
+              <a:t>« Bienvenue aux ADICOMDAYS. »</a:t>
+            </a:r>
+          </a:p>
+        </p:txBody>
+      </p:sp>
+      <p:sp>
+        <p:nvSpPr>
+          <p:cNvPr id="20" name="TextBox 19"/>
+          <p:cNvSpPr txBox="1"/>
+          <p:nvPr/>
+        </p:nvSpPr>
+        <p:spPr>
+          <a:xfrm>
+            <a:off x="548640" y="5532120"/>
+            <a:ext cx="11064240" cy="548640"/>
+          </a:xfrm>
+          <a:prstGeom prst="rect">
+            <a:avLst/>
+          </a:prstGeom>
+          <a:noFill/>
+        </p:spPr>
+        <p:txBody>
+          <a:bodyPr wrap="square" lIns="0" rIns="0" tIns="0" bIns="0">
+            <a:spAutoFit/>
+          </a:bodyPr>
+          <a:lstStyle/>
+          <a:p>
+            <a:pPr>
+              <a:spcAft>
+                <a:spcPts val="359"/>
+              </a:spcAft>
+            </a:pPr>
+            <a:r>
+              <a:rPr sz="1200" b="0">
                 <a:solidFill>
                   <a:srgbClr val="141414"/>
-                </a:solidFill>
-                <a:latin typeface="Montserrat"/>
-              </a:rPr>
-              <a:t>Les textes</a:t>
-            </a:r>
-          </a:p>
-        </p:txBody>
-      </p:sp>
-      <p:sp>
-        <p:nvSpPr>
-          <p:cNvPr id="18" name="TextBox 17"/>
-          <p:cNvSpPr txBox="1"/>
-          <p:nvPr/>
-        </p:nvSpPr>
-        <p:spPr>
-          <a:xfrm>
-            <a:off x="548640" y="5212080"/>
-            <a:ext cx="11064240" cy="1005840"/>
-          </a:xfrm>
-          <a:prstGeom prst="rect">
-            <a:avLst/>
-          </a:prstGeom>
-          <a:noFill/>
-        </p:spPr>
-        <p:txBody>
-          <a:bodyPr wrap="square" lIns="0" rIns="0" tIns="0" bIns="0">
-            <a:spAutoFit/>
-          </a:bodyPr>
-          <a:lstStyle/>
-          <a:p>
-            <a:pPr>
-              <a:spcAft>
-                <a:spcPts val="359"/>
-              </a:spcAft>
-            </a:pPr>
-            <a:r>
-              <a:rPr sz="1200" b="0">
-                <a:solidFill>
-                  <a:srgbClr val="555555"/>
-                </a:solidFill>
-                <a:latin typeface="Montserrat"/>
-              </a:rPr>
-              <a:t>Équipe : « Bienvenue dans la tribu. »  ·  Client : « Merci d’avoir créé avec nous. »  ·  ADICOMDAYS : « Bienvenue aux ADICOMDAYS. »</a:t>
-            </a:r>
-          </a:p>
-          <a:p>
-            <a:pPr>
-              <a:spcAft>
-                <a:spcPts val="359"/>
-              </a:spcAft>
-            </a:pPr>
-            <a:r>
-              <a:rPr sz="1200" b="0">
-                <a:solidFill>
-                  <a:srgbClr val="555555"/>
                 </a:solidFill>
                 <a:latin typeface="Montserrat"/>
               </a:rPr>
@@ -4704,8 +4766,8 @@
         </p:nvSpPr>
         <p:spPr>
           <a:xfrm>
-            <a:off x="548640" y="2148840"/>
-            <a:ext cx="11064240" cy="548640"/>
+            <a:off x="548640" y="2103120"/>
+            <a:ext cx="11064240" cy="512064"/>
           </a:xfrm>
           <a:prstGeom prst="rect">
             <a:avLst/>
@@ -4748,8 +4810,8 @@
         </p:nvSpPr>
         <p:spPr>
           <a:xfrm>
-            <a:off x="685800" y="2148840"/>
-            <a:ext cx="3017520" cy="548640"/>
+            <a:off x="685800" y="2103120"/>
+            <a:ext cx="3017520" cy="512064"/>
           </a:xfrm>
           <a:prstGeom prst="rect">
             <a:avLst/>
@@ -4787,8 +4849,8 @@
         </p:nvSpPr>
         <p:spPr>
           <a:xfrm>
-            <a:off x="3977640" y="2148840"/>
-            <a:ext cx="3017520" cy="548640"/>
+            <a:off x="3977640" y="2103120"/>
+            <a:ext cx="3017520" cy="512064"/>
           </a:xfrm>
           <a:prstGeom prst="rect">
             <a:avLst/>
@@ -4826,8 +4888,8 @@
         </p:nvSpPr>
         <p:spPr>
           <a:xfrm>
-            <a:off x="7269480" y="2148840"/>
-            <a:ext cx="4206240" cy="548640"/>
+            <a:off x="7269480" y="2103120"/>
+            <a:ext cx="4206240" cy="512064"/>
           </a:xfrm>
           <a:prstGeom prst="rect">
             <a:avLst/>
@@ -4865,8 +4927,8 @@
         </p:nvSpPr>
         <p:spPr>
           <a:xfrm>
-            <a:off x="548640" y="2770632"/>
-            <a:ext cx="11064240" cy="548640"/>
+            <a:off x="548640" y="2688336"/>
+            <a:ext cx="11064240" cy="512064"/>
           </a:xfrm>
           <a:prstGeom prst="rect">
             <a:avLst/>
@@ -4909,8 +4971,8 @@
         </p:nvSpPr>
         <p:spPr>
           <a:xfrm>
-            <a:off x="685800" y="2770632"/>
-            <a:ext cx="3017520" cy="548640"/>
+            <a:off x="685800" y="2688336"/>
+            <a:ext cx="3017520" cy="512064"/>
           </a:xfrm>
           <a:prstGeom prst="rect">
             <a:avLst/>
@@ -4948,8 +5010,8 @@
         </p:nvSpPr>
         <p:spPr>
           <a:xfrm>
-            <a:off x="3977640" y="2770632"/>
-            <a:ext cx="3017520" cy="548640"/>
+            <a:off x="3977640" y="2688336"/>
+            <a:ext cx="3017520" cy="512064"/>
           </a:xfrm>
           <a:prstGeom prst="rect">
             <a:avLst/>
@@ -4987,8 +5049,8 @@
         </p:nvSpPr>
         <p:spPr>
           <a:xfrm>
-            <a:off x="7269480" y="2770632"/>
-            <a:ext cx="4206240" cy="548640"/>
+            <a:off x="7269480" y="2688336"/>
+            <a:ext cx="4206240" cy="512064"/>
           </a:xfrm>
           <a:prstGeom prst="rect">
             <a:avLst/>
@@ -5026,8 +5088,8 @@
         </p:nvSpPr>
         <p:spPr>
           <a:xfrm>
-            <a:off x="548640" y="3392424"/>
-            <a:ext cx="11064240" cy="548640"/>
+            <a:off x="548640" y="3273552"/>
+            <a:ext cx="11064240" cy="512064"/>
           </a:xfrm>
           <a:prstGeom prst="rect">
             <a:avLst/>
@@ -5070,8 +5132,8 @@
         </p:nvSpPr>
         <p:spPr>
           <a:xfrm>
-            <a:off x="685800" y="3392424"/>
-            <a:ext cx="3017520" cy="548640"/>
+            <a:off x="685800" y="3273552"/>
+            <a:ext cx="3017520" cy="512064"/>
           </a:xfrm>
           <a:prstGeom prst="rect">
             <a:avLst/>
@@ -5109,8 +5171,8 @@
         </p:nvSpPr>
         <p:spPr>
           <a:xfrm>
-            <a:off x="3977640" y="3392424"/>
-            <a:ext cx="3017520" cy="548640"/>
+            <a:off x="3977640" y="3273552"/>
+            <a:ext cx="3017520" cy="512064"/>
           </a:xfrm>
           <a:prstGeom prst="rect">
             <a:avLst/>
@@ -5148,8 +5210,8 @@
         </p:nvSpPr>
         <p:spPr>
           <a:xfrm>
-            <a:off x="7269480" y="3392424"/>
-            <a:ext cx="4206240" cy="548640"/>
+            <a:off x="7269480" y="3273552"/>
+            <a:ext cx="4206240" cy="512064"/>
           </a:xfrm>
           <a:prstGeom prst="rect">
             <a:avLst/>
@@ -5187,8 +5249,8 @@
         </p:nvSpPr>
         <p:spPr>
           <a:xfrm>
-            <a:off x="548640" y="4014216"/>
-            <a:ext cx="11064240" cy="548640"/>
+            <a:off x="548640" y="3858768"/>
+            <a:ext cx="11064240" cy="512064"/>
           </a:xfrm>
           <a:prstGeom prst="rect">
             <a:avLst/>
@@ -5231,8 +5293,8 @@
         </p:nvSpPr>
         <p:spPr>
           <a:xfrm>
-            <a:off x="685800" y="4014216"/>
-            <a:ext cx="3017520" cy="548640"/>
+            <a:off x="685800" y="3858768"/>
+            <a:ext cx="3017520" cy="512064"/>
           </a:xfrm>
           <a:prstGeom prst="rect">
             <a:avLst/>
@@ -5270,8 +5332,8 @@
         </p:nvSpPr>
         <p:spPr>
           <a:xfrm>
-            <a:off x="3977640" y="4014216"/>
-            <a:ext cx="3017520" cy="548640"/>
+            <a:off x="3977640" y="3858768"/>
+            <a:ext cx="3017520" cy="512064"/>
           </a:xfrm>
           <a:prstGeom prst="rect">
             <a:avLst/>
@@ -5309,8 +5371,8 @@
         </p:nvSpPr>
         <p:spPr>
           <a:xfrm>
-            <a:off x="7269480" y="4014216"/>
-            <a:ext cx="4206240" cy="548640"/>
+            <a:off x="7269480" y="3858768"/>
+            <a:ext cx="4206240" cy="512064"/>
           </a:xfrm>
           <a:prstGeom prst="rect">
             <a:avLst/>
@@ -5348,8 +5410,8 @@
         </p:nvSpPr>
         <p:spPr>
           <a:xfrm>
-            <a:off x="548640" y="4636008"/>
-            <a:ext cx="11064240" cy="548640"/>
+            <a:off x="548640" y="4443983"/>
+            <a:ext cx="11064240" cy="512064"/>
           </a:xfrm>
           <a:prstGeom prst="rect">
             <a:avLst/>
@@ -5392,8 +5454,8 @@
         </p:nvSpPr>
         <p:spPr>
           <a:xfrm>
-            <a:off x="685800" y="4636008"/>
-            <a:ext cx="3017520" cy="548640"/>
+            <a:off x="685800" y="4443983"/>
+            <a:ext cx="3017520" cy="512064"/>
           </a:xfrm>
           <a:prstGeom prst="rect">
             <a:avLst/>
@@ -5431,8 +5493,8 @@
         </p:nvSpPr>
         <p:spPr>
           <a:xfrm>
-            <a:off x="3977640" y="4636008"/>
-            <a:ext cx="3017520" cy="548640"/>
+            <a:off x="3977640" y="4443983"/>
+            <a:ext cx="3017520" cy="512064"/>
           </a:xfrm>
           <a:prstGeom prst="rect">
             <a:avLst/>
@@ -5470,8 +5532,8 @@
         </p:nvSpPr>
         <p:spPr>
           <a:xfrm>
-            <a:off x="7269480" y="4636008"/>
-            <a:ext cx="4206240" cy="548640"/>
+            <a:off x="7269480" y="4443983"/>
+            <a:ext cx="4206240" cy="512064"/>
           </a:xfrm>
           <a:prstGeom prst="rect">
             <a:avLst/>
@@ -5509,8 +5571,8 @@
         </p:nvSpPr>
         <p:spPr>
           <a:xfrm>
-            <a:off x="548640" y="5257800"/>
-            <a:ext cx="11064240" cy="548640"/>
+            <a:off x="548640" y="5029200"/>
+            <a:ext cx="11064240" cy="512064"/>
           </a:xfrm>
           <a:prstGeom prst="rect">
             <a:avLst/>
@@ -5553,8 +5615,8 @@
         </p:nvSpPr>
         <p:spPr>
           <a:xfrm>
-            <a:off x="685800" y="5257800"/>
-            <a:ext cx="3017520" cy="548640"/>
+            <a:off x="685800" y="5029200"/>
+            <a:ext cx="3017520" cy="512064"/>
           </a:xfrm>
           <a:prstGeom prst="rect">
             <a:avLst/>
@@ -5592,8 +5654,8 @@
         </p:nvSpPr>
         <p:spPr>
           <a:xfrm>
-            <a:off x="3977640" y="5257800"/>
-            <a:ext cx="3017520" cy="548640"/>
+            <a:off x="3977640" y="5029200"/>
+            <a:ext cx="3017520" cy="512064"/>
           </a:xfrm>
           <a:prstGeom prst="rect">
             <a:avLst/>
@@ -5631,8 +5693,8 @@
         </p:nvSpPr>
         <p:spPr>
           <a:xfrm>
-            <a:off x="7269480" y="5257800"/>
-            <a:ext cx="4206240" cy="548640"/>
+            <a:off x="7269480" y="5029200"/>
+            <a:ext cx="4206240" cy="512064"/>
           </a:xfrm>
           <a:prstGeom prst="rect">
             <a:avLst/>
@@ -5670,7 +5732,7 @@
         </p:nvSpPr>
         <p:spPr>
           <a:xfrm>
-            <a:off x="548640" y="5943600"/>
+            <a:off x="548640" y="5852160"/>
             <a:ext cx="11064240" cy="365760"/>
           </a:xfrm>
           <a:prstGeom prst="rect">
@@ -6994,7 +7056,7 @@
         <p:spPr>
           <a:xfrm>
             <a:off x="548640" y="2194560"/>
-            <a:ext cx="11064240" cy="1188720"/>
+            <a:ext cx="11064240" cy="1051560"/>
           </a:xfrm>
           <a:prstGeom prst="rect">
             <a:avLst/>
@@ -7040,7 +7102,7 @@
         <p:spPr>
           <a:xfrm>
             <a:off x="548640" y="2194560"/>
-            <a:ext cx="1737360" cy="1188720"/>
+            <a:ext cx="1737360" cy="1051560"/>
           </a:xfrm>
           <a:prstGeom prst="rect">
             <a:avLst/>
@@ -7084,7 +7146,7 @@
         <p:spPr>
           <a:xfrm>
             <a:off x="685800" y="2194560"/>
-            <a:ext cx="1463040" cy="1188720"/>
+            <a:ext cx="1463040" cy="1051560"/>
           </a:xfrm>
           <a:prstGeom prst="rect">
             <a:avLst/>
@@ -7123,7 +7185,7 @@
         <p:spPr>
           <a:xfrm>
             <a:off x="2423160" y="2194560"/>
-            <a:ext cx="2697480" cy="1188720"/>
+            <a:ext cx="2697480" cy="1051560"/>
           </a:xfrm>
           <a:prstGeom prst="rect">
             <a:avLst/>
@@ -7162,7 +7224,7 @@
         <p:spPr>
           <a:xfrm>
             <a:off x="5394960" y="2194560"/>
-            <a:ext cx="2468880" cy="1188720"/>
+            <a:ext cx="2468880" cy="1051560"/>
           </a:xfrm>
           <a:prstGeom prst="rect">
             <a:avLst/>
@@ -7201,7 +7263,7 @@
         <p:spPr>
           <a:xfrm>
             <a:off x="8138160" y="2194560"/>
-            <a:ext cx="3337560" cy="1188720"/>
+            <a:ext cx="3337560" cy="1051560"/>
           </a:xfrm>
           <a:prstGeom prst="rect">
             <a:avLst/>
@@ -7239,8 +7301,8 @@
         </p:nvSpPr>
         <p:spPr>
           <a:xfrm>
-            <a:off x="548640" y="3520439"/>
-            <a:ext cx="11064240" cy="1188720"/>
+            <a:off x="548640" y="3383280"/>
+            <a:ext cx="11064240" cy="1051560"/>
           </a:xfrm>
           <a:prstGeom prst="rect">
             <a:avLst/>
@@ -7285,8 +7347,8 @@
         </p:nvSpPr>
         <p:spPr>
           <a:xfrm>
-            <a:off x="548640" y="3520439"/>
-            <a:ext cx="1737360" cy="1188720"/>
+            <a:off x="548640" y="3383280"/>
+            <a:ext cx="1737360" cy="1051560"/>
           </a:xfrm>
           <a:prstGeom prst="rect">
             <a:avLst/>
@@ -7329,8 +7391,8 @@
         </p:nvSpPr>
         <p:spPr>
           <a:xfrm>
-            <a:off x="685800" y="3520439"/>
-            <a:ext cx="1463040" cy="1188720"/>
+            <a:off x="685800" y="3383280"/>
+            <a:ext cx="1463040" cy="1051560"/>
           </a:xfrm>
           <a:prstGeom prst="rect">
             <a:avLst/>
@@ -7368,8 +7430,8 @@
         </p:nvSpPr>
         <p:spPr>
           <a:xfrm>
-            <a:off x="2423160" y="3520439"/>
-            <a:ext cx="2697480" cy="1188720"/>
+            <a:off x="2423160" y="3383280"/>
+            <a:ext cx="2697480" cy="1051560"/>
           </a:xfrm>
           <a:prstGeom prst="rect">
             <a:avLst/>
@@ -7407,8 +7469,8 @@
         </p:nvSpPr>
         <p:spPr>
           <a:xfrm>
-            <a:off x="5394960" y="3520439"/>
-            <a:ext cx="2468880" cy="1188720"/>
+            <a:off x="5394960" y="3383280"/>
+            <a:ext cx="2468880" cy="1051560"/>
           </a:xfrm>
           <a:prstGeom prst="rect">
             <a:avLst/>
@@ -7446,8 +7508,8 @@
         </p:nvSpPr>
         <p:spPr>
           <a:xfrm>
-            <a:off x="8138160" y="3520439"/>
-            <a:ext cx="3337560" cy="1188720"/>
+            <a:off x="8138160" y="3383280"/>
+            <a:ext cx="3337560" cy="1051560"/>
           </a:xfrm>
           <a:prstGeom prst="rect">
             <a:avLst/>
@@ -7485,8 +7547,8 @@
         </p:nvSpPr>
         <p:spPr>
           <a:xfrm>
-            <a:off x="548640" y="4846320"/>
-            <a:ext cx="11064240" cy="1188720"/>
+            <a:off x="548640" y="4572000"/>
+            <a:ext cx="11064240" cy="1051560"/>
           </a:xfrm>
           <a:prstGeom prst="rect">
             <a:avLst/>
@@ -7531,8 +7593,8 @@
         </p:nvSpPr>
         <p:spPr>
           <a:xfrm>
-            <a:off x="548640" y="4846320"/>
-            <a:ext cx="1737360" cy="1188720"/>
+            <a:off x="548640" y="4572000"/>
+            <a:ext cx="1737360" cy="1051560"/>
           </a:xfrm>
           <a:prstGeom prst="rect">
             <a:avLst/>
@@ -7575,8 +7637,8 @@
         </p:nvSpPr>
         <p:spPr>
           <a:xfrm>
-            <a:off x="685800" y="4846320"/>
-            <a:ext cx="1463040" cy="1188720"/>
+            <a:off x="685800" y="4572000"/>
+            <a:ext cx="1463040" cy="1051560"/>
           </a:xfrm>
           <a:prstGeom prst="rect">
             <a:avLst/>
@@ -7614,8 +7676,8 @@
         </p:nvSpPr>
         <p:spPr>
           <a:xfrm>
-            <a:off x="2423160" y="4846320"/>
-            <a:ext cx="2697480" cy="1188720"/>
+            <a:off x="2423160" y="4572000"/>
+            <a:ext cx="2697480" cy="1051560"/>
           </a:xfrm>
           <a:prstGeom prst="rect">
             <a:avLst/>
@@ -7653,8 +7715,8 @@
         </p:nvSpPr>
         <p:spPr>
           <a:xfrm>
-            <a:off x="5394960" y="4846320"/>
-            <a:ext cx="2468880" cy="1188720"/>
+            <a:off x="5394960" y="4572000"/>
+            <a:ext cx="2468880" cy="1051560"/>
           </a:xfrm>
           <a:prstGeom prst="rect">
             <a:avLst/>
@@ -7692,8 +7754,8 @@
         </p:nvSpPr>
         <p:spPr>
           <a:xfrm>
-            <a:off x="8138160" y="4846320"/>
-            <a:ext cx="3337560" cy="1188720"/>
+            <a:off x="8138160" y="4572000"/>
+            <a:ext cx="3337560" cy="1051560"/>
           </a:xfrm>
           <a:prstGeom prst="rect">
             <a:avLst/>
@@ -7718,7 +7780,7 @@
                 </a:solidFill>
                 <a:latin typeface="Montserrat"/>
               </a:rPr>
-              <a:t>Le tote « Tous connectés » sert de sac du kit.</a:t>
+              <a:t>Le tote à icônes sert de sac du kit.</a:t>
             </a:r>
           </a:p>
         </p:txBody>
@@ -7731,7 +7793,7 @@
         </p:nvSpPr>
         <p:spPr>
           <a:xfrm>
-            <a:off x="548640" y="5897880"/>
+            <a:off x="548640" y="5852160"/>
             <a:ext cx="10972800" cy="365760"/>
           </a:xfrm>
           <a:prstGeom prst="rect">
@@ -7928,7 +7990,7 @@
       </p:sp>
       <p:pic>
         <p:nvPicPr>
-          <p:cNvPr id="6" name="Picture 5" descr="kit-equipe_boite_85.jpg"/>
+          <p:cNvPr id="6" name="Picture 5" descr="kit-equipe_boite_85_3.jpg"/>
           <p:cNvPicPr>
             <a:picLocks noChangeAspect="1"/>
           </p:cNvPicPr>
@@ -8633,7 +8695,7 @@
       </p:sp>
       <p:pic>
         <p:nvPicPr>
-          <p:cNvPr id="8" name="Picture 7" descr="04_tshirt-noir_on-est-ensemble_86.jpg"/>
+          <p:cNvPr id="8" name="Picture 7" descr="04_tshirt-noir_on-est-ensemble_86_50.jpg"/>
           <p:cNvPicPr>
             <a:picLocks noChangeAspect="1"/>
           </p:cNvPicPr>
@@ -8733,7 +8795,7 @@
                 </a:solidFill>
                 <a:latin typeface="Montserrat"/>
               </a:rPr>
-              <a:t>T-shirt « On est ensemble. »</a:t>
+              <a:t>T-shirt noir</a:t>
             </a:r>
           </a:p>
         </p:txBody>
@@ -8772,14 +8834,14 @@
                 </a:solidFill>
                 <a:latin typeface="Montserrat"/>
               </a:rPr>
-              <a:t>Sérigraphie 2 couleurs</a:t>
+              <a:t>« On est ensemble. »</a:t>
             </a:r>
           </a:p>
         </p:txBody>
       </p:sp>
       <p:pic>
         <p:nvPicPr>
-          <p:cNvPr id="12" name="Picture 11" descr="06_sweat_logo_86.jpg"/>
+          <p:cNvPr id="12" name="Picture 11" descr="06_sweat_logo_86_50.jpg"/>
           <p:cNvPicPr>
             <a:picLocks noChangeAspect="1"/>
           </p:cNvPicPr>
@@ -8925,7 +8987,7 @@
       </p:sp>
       <p:pic>
         <p:nvPicPr>
-          <p:cNvPr id="16" name="Picture 15" descr="14_casquette_brodee_86.jpg"/>
+          <p:cNvPr id="16" name="Picture 15" descr="14_casquette_brodee_86_50.jpg"/>
           <p:cNvPicPr>
             <a:picLocks noChangeAspect="1"/>
           </p:cNvPicPr>
@@ -9071,7 +9133,7 @@
       </p:sp>
       <p:pic>
         <p:nvPicPr>
-          <p:cNvPr id="20" name="Picture 19" descr="08_mug-noir_cafe-puis-crea_86.jpg"/>
+          <p:cNvPr id="20" name="Picture 19" descr="08_mug-noir_cafe-puis-crea_86_50.jpg"/>
           <p:cNvPicPr>
             <a:picLocks noChangeAspect="1"/>
           </p:cNvPicPr>
@@ -9217,7 +9279,7 @@
       </p:sp>
       <p:pic>
         <p:nvPicPr>
-          <p:cNvPr id="24" name="Picture 23" descr="planche-de-stickers_86.jpg"/>
+          <p:cNvPr id="24" name="Picture 23" descr="planche-de-stickers_86_50.jpg"/>
           <p:cNvPicPr>
             <a:picLocks noChangeAspect="1"/>
           </p:cNvPicPr>
@@ -9409,7 +9471,7 @@
       </p:sp>
       <p:pic>
         <p:nvPicPr>
-          <p:cNvPr id="29" name="Picture 28" descr="kit-equipe_carte_146.jpg"/>
+          <p:cNvPr id="29" name="Picture 28" descr="kit-equipe_carte_146_50.jpg"/>
           <p:cNvPicPr>
             <a:picLocks noChangeAspect="1"/>
           </p:cNvPicPr>
@@ -9636,7 +9698,7 @@
       </p:sp>
       <p:pic>
         <p:nvPicPr>
-          <p:cNvPr id="6" name="Picture 5" descr="kit-client_boite_85.jpg"/>
+          <p:cNvPr id="6" name="Picture 5" descr="kit-client_boite_85_50.jpg"/>
           <p:cNvPicPr>
             <a:picLocks noChangeAspect="1"/>
           </p:cNvPicPr>
@@ -10341,7 +10403,7 @@
       </p:sp>
       <p:pic>
         <p:nvPicPr>
-          <p:cNvPr id="8" name="Picture 7" descr="03_tote-porte_logo_86.jpg"/>
+          <p:cNvPr id="8" name="Picture 7" descr="03_tote-porte_logo_86_50.jpg"/>
           <p:cNvPicPr>
             <a:picLocks noChangeAspect="1"/>
           </p:cNvPicPr>
@@ -10487,7 +10549,7 @@
       </p:sp>
       <p:pic>
         <p:nvPicPr>
-          <p:cNvPr id="12" name="Picture 11" descr="09_carnet-kraft_icones_86.jpg"/>
+          <p:cNvPr id="12" name="Picture 11" descr="09_carnet-kraft_icones_86_50.jpg"/>
           <p:cNvPicPr>
             <a:picLocks noChangeAspect="1"/>
           </p:cNvPicPr>
@@ -10626,14 +10688,14 @@
                 </a:solidFill>
                 <a:latin typeface="Montserrat"/>
               </a:rPr>
-              <a:t>Couverture « Tous connectés »</a:t>
+              <a:t>Couverture à icônes</a:t>
             </a:r>
           </a:p>
         </p:txBody>
       </p:sp>
       <p:pic>
         <p:nvPicPr>
-          <p:cNvPr id="16" name="Picture 15" descr="07_mugs-blancs_duo_86.jpg"/>
+          <p:cNvPr id="16" name="Picture 15" descr="07_mugs-blancs_duo_86_50.jpg"/>
           <p:cNvPicPr>
             <a:picLocks noChangeAspect="1"/>
           </p:cNvPicPr>
@@ -10772,14 +10834,14 @@
                 </a:solidFill>
                 <a:latin typeface="Montserrat"/>
               </a:rPr>
-              <a:t>Logo et « Café, puis créa »</a:t>
+              <a:t>Logo et slogan</a:t>
             </a:r>
           </a:p>
         </p:txBody>
       </p:sp>
       <p:pic>
         <p:nvPicPr>
-          <p:cNvPr id="20" name="Picture 19" descr="12_sac-kraft_logo_86.jpg"/>
+          <p:cNvPr id="20" name="Picture 19" descr="12_sac-kraft_logo_86_50.jpg"/>
           <p:cNvPicPr>
             <a:picLocks noChangeAspect="1"/>
           </p:cNvPicPr>
@@ -10925,7 +10987,7 @@
       </p:sp>
       <p:pic>
         <p:nvPicPr>
-          <p:cNvPr id="24" name="Picture 23" descr="planche-de-stickers_86.jpg"/>
+          <p:cNvPr id="24" name="Picture 23" descr="planche-de-stickers_86_50.jpg"/>
           <p:cNvPicPr>
             <a:picLocks noChangeAspect="1"/>
           </p:cNvPicPr>
@@ -11117,7 +11179,7 @@
       </p:sp>
       <p:pic>
         <p:nvPicPr>
-          <p:cNvPr id="29" name="Picture 28" descr="kit-client_carte_146.jpg"/>
+          <p:cNvPr id="29" name="Picture 28" descr="kit-client_carte_146_50.jpg"/>
           <p:cNvPicPr>
             <a:picLocks noChangeAspect="1"/>
           </p:cNvPicPr>
@@ -11344,7 +11406,7 @@
       </p:sp>
       <p:pic>
         <p:nvPicPr>
-          <p:cNvPr id="6" name="Picture 5" descr="10_badge-adicomdays_85.jpg"/>
+          <p:cNvPr id="6" name="Picture 5" descr="10_badge-adicomdays_85_50.jpg"/>
           <p:cNvPicPr>
             <a:picLocks noChangeAspect="1"/>
           </p:cNvPicPr>
@@ -11717,7 +11779,7 @@
                 </a:solidFill>
                 <a:latin typeface="Montserrat"/>
               </a:rPr>
-              <a:t>Le tote « Tous connectés » sert de sac du kit.</a:t>
+              <a:t>Le tote à icônes sert de sac du kit.</a:t>
             </a:r>
           </a:p>
         </p:txBody>
@@ -12049,7 +12111,7 @@
       </p:sp>
       <p:pic>
         <p:nvPicPr>
-          <p:cNvPr id="8" name="Picture 7" descr="10_badge-adicomdays_86.jpg"/>
+          <p:cNvPr id="8" name="Picture 7" descr="10_badge-adicomdays_86_50.jpg"/>
           <p:cNvPicPr>
             <a:picLocks noChangeAspect="1"/>
           </p:cNvPicPr>
@@ -12149,7 +12211,7 @@
                 </a:solidFill>
                 <a:latin typeface="Montserrat"/>
               </a:rPr>
-              <a:t>Badge et tour de cou</a:t>
+              <a:t>Badge nominatif</a:t>
             </a:r>
           </a:p>
         </p:txBody>
@@ -12188,14 +12250,14 @@
                 </a:solidFill>
                 <a:latin typeface="Montserrat"/>
               </a:rPr>
-              <a:t>Nom, rôle, filet 4 couleurs</a:t>
+              <a:t>Avec tour de cou</a:t>
             </a:r>
           </a:p>
         </p:txBody>
       </p:sp>
       <p:pic>
         <p:nvPicPr>
-          <p:cNvPr id="12" name="Picture 11" descr="17_badge-epingle_86.jpg"/>
+          <p:cNvPr id="12" name="Picture 11" descr="17_badge-epingle_86_50.jpg"/>
           <p:cNvPicPr>
             <a:picLocks noChangeAspect="1"/>
           </p:cNvPicPr>
@@ -12341,7 +12403,7 @@
       </p:sp>
       <p:pic>
         <p:nvPicPr>
-          <p:cNvPr id="16" name="Picture 15" descr="13_gobelet_cafe_86.jpg"/>
+          <p:cNvPr id="16" name="Picture 15" descr="13_gobelet_cafe_86_50.jpg"/>
           <p:cNvPicPr>
             <a:picLocks noChangeAspect="1"/>
           </p:cNvPicPr>
@@ -12487,7 +12549,7 @@
       </p:sp>
       <p:pic>
         <p:nvPicPr>
-          <p:cNvPr id="20" name="Picture 19" descr="11_gourde_86.jpg"/>
+          <p:cNvPr id="20" name="Picture 19" descr="11_gourde_86_50.jpg"/>
           <p:cNvPicPr>
             <a:picLocks noChangeAspect="1"/>
           </p:cNvPicPr>
@@ -12626,14 +12688,14 @@
                 </a:solidFill>
                 <a:latin typeface="Montserrat"/>
               </a:rPr>
-              <a:t>« Hydraté. Inspiré. »</a:t>
+              <a:t>Hydraté. Inspiré.</a:t>
             </a:r>
           </a:p>
         </p:txBody>
       </p:sp>
       <p:pic>
         <p:nvPicPr>
-          <p:cNvPr id="24" name="Picture 23" descr="02_tote-blanc_tous-connectes_86.jpg"/>
+          <p:cNvPr id="24" name="Picture 23" descr="02_tote-blanc_tous-connectes_86_50.jpg"/>
           <p:cNvPicPr>
             <a:picLocks noChangeAspect="1"/>
           </p:cNvPicPr>
@@ -12733,7 +12795,7 @@
                 </a:solidFill>
                 <a:latin typeface="Montserrat"/>
               </a:rPr>
-              <a:t>Tote « Tous connectés »</a:t>
+              <a:t>Tote à icônes</a:t>
             </a:r>
           </a:p>
         </p:txBody>
@@ -12825,7 +12887,7 @@
       </p:sp>
       <p:pic>
         <p:nvPicPr>
-          <p:cNvPr id="29" name="Picture 28" descr="kit-adicomdays_carte_146.jpg"/>
+          <p:cNvPr id="29" name="Picture 28" descr="kit-adicomdays_carte_146_50.jpg"/>
           <p:cNvPicPr>
             <a:picLocks noChangeAspect="1"/>
           </p:cNvPicPr>
@@ -13130,7 +13192,7 @@
       </p:sp>
       <p:pic>
         <p:nvPicPr>
-          <p:cNvPr id="8" name="Picture 7" descr="planche-de-stickers_93.jpg"/>
+          <p:cNvPr id="8" name="Picture 7" descr="planche-de-stickers_93_50.jpg"/>
           <p:cNvPicPr>
             <a:picLocks noChangeAspect="1"/>
           </p:cNvPicPr>
